--- a/courses/build/mentor-3day/M-ON.pptx
+++ b/courses/build/mentor-3day/M-ON.pptx
@@ -4356,7 +4356,7 @@
     <p:bg>
       <p:bgPr>
         <a:solidFill>
-          <a:srgbClr val="1F4D2B"/>
+          <a:srgbClr val="2E3440"/>
         </a:solidFill>
         <a:effectLst/>
       </p:bgPr>
@@ -4398,9 +4398,9 @@
             <a:r>
               <a:rPr sz="1000" b="0">
                 <a:solidFill>
-                  <a:srgbClr val="A8D88A"/>
-                </a:solidFill>
-                <a:latin typeface="Arial"/>
+                  <a:srgbClr val="FAF7F0"/>
+                </a:solidFill>
+                <a:latin typeface="Calibri"/>
               </a:rPr>
               <a:t>M-ON-01</a:t>
             </a:r>
@@ -4437,9 +4437,9 @@
             <a:r>
               <a:rPr sz="1000" b="0">
                 <a:solidFill>
-                  <a:srgbClr val="A8D88A"/>
-                </a:solidFill>
-                <a:latin typeface="Arial"/>
+                  <a:srgbClr val="FAF7F0"/>
+                </a:solidFill>
+                <a:latin typeface="Calibri"/>
               </a:rPr>
               <a:t>Walking With Farmers</a:t>
             </a:r>
@@ -4476,7 +4476,7 @@
             <a:r>
               <a:rPr sz="4800" b="1">
                 <a:solidFill>
-                  <a:srgbClr val="F7F2E9"/>
+                  <a:srgbClr val="FAF7F0"/>
                 </a:solidFill>
                 <a:latin typeface="Georgia"/>
               </a:rPr>
@@ -4500,7 +4500,7 @@
             <a:avLst/>
           </a:prstGeom>
           <a:solidFill>
-            <a:srgbClr val="C07A1E"/>
+            <a:srgbClr val="D9622B"/>
           </a:solidFill>
           <a:ln>
             <a:noFill/>
@@ -4559,9 +4559,9 @@
             <a:r>
               <a:rPr sz="2400" b="0">
                 <a:solidFill>
-                  <a:srgbClr val="A8D88A"/>
-                </a:solidFill>
-                <a:latin typeface="Arial"/>
+                  <a:srgbClr val="FAF7F0"/>
+                </a:solidFill>
+                <a:latin typeface="Calibri"/>
               </a:rPr>
               <a:t>Six weeks · WhatsApp classroom</a:t>
             </a:r>
@@ -4575,9 +4575,9 @@
             <a:r>
               <a:rPr sz="2400" b="0">
                 <a:solidFill>
-                  <a:srgbClr val="A8D88A"/>
-                </a:solidFill>
-                <a:latin typeface="Arial"/>
+                  <a:srgbClr val="FAF7F0"/>
+                </a:solidFill>
+                <a:latin typeface="Calibri"/>
               </a:rPr>
               <a:t>A field task every week</a:t>
             </a:r>
@@ -4599,11 +4599,11 @@
             <a:avLst/>
           </a:prstGeom>
           <a:solidFill>
-            <a:srgbClr val="FBF6EC"/>
+            <a:srgbClr val="FAF7F0"/>
           </a:solidFill>
           <a:ln w="15875">
             <a:solidFill>
-              <a:srgbClr val="E2D8C4"/>
+              <a:srgbClr val="6E9CC4"/>
             </a:solidFill>
           </a:ln>
           <a:effectLst/>
@@ -4660,9 +4660,9 @@
             <a:r>
               <a:rPr sz="1200" b="1">
                 <a:solidFill>
-                  <a:srgbClr val="C07A1E"/>
-                </a:solidFill>
-                <a:latin typeface="Arial"/>
+                  <a:srgbClr val="D9622B"/>
+                </a:solidFill>
+                <a:latin typeface="Calibri"/>
               </a:rPr>
               <a:t>IMAGE · M-IMG-10 · coming</a:t>
             </a:r>
@@ -4699,7 +4699,7 @@
             <a:r>
               <a:rPr sz="1800" b="1">
                 <a:solidFill>
-                  <a:srgbClr val="1F4D2B"/>
+                  <a:srgbClr val="232323"/>
                 </a:solidFill>
                 <a:latin typeface="Georgia"/>
               </a:rPr>
@@ -4738,9 +4738,9 @@
             <a:r>
               <a:rPr sz="1100" b="0">
                 <a:solidFill>
-                  <a:srgbClr val="20190F"/>
-                </a:solidFill>
-                <a:latin typeface="Arial"/>
+                  <a:srgbClr val="232323"/>
+                </a:solidFill>
+                <a:latin typeface="Calibri"/>
               </a:rPr>
               <a:t>The mentor sits on a low wall at the edge of a garden in the late afternoon, holding a phone to her mouth to record a voice note, a printed A5 card and notebook on her lap. Blank screen. 16:9. --- **Still images (REUSE)**</a:t>
             </a:r>
@@ -4761,7 +4761,7 @@
     <p:bg>
       <p:bgPr>
         <a:solidFill>
-          <a:srgbClr val="F7F2E9"/>
+          <a:srgbClr val="FAF7F0"/>
         </a:solidFill>
         <a:effectLst/>
       </p:bgPr>
@@ -4803,9 +4803,9 @@
             <a:r>
               <a:rPr sz="1000" b="0">
                 <a:solidFill>
-                  <a:srgbClr val="6B6255"/>
-                </a:solidFill>
-                <a:latin typeface="Arial"/>
+                  <a:srgbClr val="232323"/>
+                </a:solidFill>
+                <a:latin typeface="Calibri"/>
               </a:rPr>
               <a:t>M-ON-10   ·   Poster M-P13</a:t>
             </a:r>
@@ -4842,9 +4842,9 @@
             <a:r>
               <a:rPr sz="1000" b="0">
                 <a:solidFill>
-                  <a:srgbClr val="6B6255"/>
-                </a:solidFill>
-                <a:latin typeface="Arial"/>
+                  <a:srgbClr val="232323"/>
+                </a:solidFill>
+                <a:latin typeface="Calibri"/>
               </a:rPr>
               <a:t>Walking With Farmers</a:t>
             </a:r>
@@ -4881,7 +4881,7 @@
             <a:r>
               <a:rPr sz="3800" b="1">
                 <a:solidFill>
-                  <a:srgbClr val="1F4D2B"/>
+                  <a:srgbClr val="232323"/>
                 </a:solidFill>
                 <a:latin typeface="Georgia"/>
               </a:rPr>
@@ -4905,7 +4905,7 @@
             <a:avLst/>
           </a:prstGeom>
           <a:solidFill>
-            <a:srgbClr val="E2D8C4"/>
+            <a:srgbClr val="6E9CC4"/>
           </a:solidFill>
           <a:ln>
             <a:noFill/>
@@ -4964,9 +4964,9 @@
             <a:r>
               <a:rPr sz="2400" b="0">
                 <a:solidFill>
-                  <a:srgbClr val="20190F"/>
-                </a:solidFill>
-                <a:latin typeface="Arial"/>
+                  <a:srgbClr val="232323"/>
+                </a:solidFill>
+                <a:latin typeface="Calibri"/>
               </a:rPr>
               <a:t>•  Cluster visits · field days · phone</a:t>
             </a:r>
@@ -4980,9 +4980,9 @@
             <a:r>
               <a:rPr sz="2400" b="0">
                 <a:solidFill>
-                  <a:srgbClr val="20190F"/>
-                </a:solidFill>
-                <a:latin typeface="Arial"/>
+                  <a:srgbClr val="232323"/>
+                </a:solidFill>
+                <a:latin typeface="Calibri"/>
               </a:rPr>
               <a:t>•  Field task: plan a cluster visit</a:t>
             </a:r>
@@ -5004,11 +5004,11 @@
             <a:avLst/>
           </a:prstGeom>
           <a:solidFill>
-            <a:srgbClr val="FBF6EC"/>
+            <a:srgbClr val="FAF7F0"/>
           </a:solidFill>
           <a:ln w="15875">
             <a:solidFill>
-              <a:srgbClr val="E2D8C4"/>
+              <a:srgbClr val="6E9CC4"/>
             </a:solidFill>
           </a:ln>
           <a:effectLst/>
@@ -5065,9 +5065,9 @@
             <a:r>
               <a:rPr sz="1200" b="1">
                 <a:solidFill>
-                  <a:srgbClr val="C07A1E"/>
-                </a:solidFill>
-                <a:latin typeface="Arial"/>
+                  <a:srgbClr val="D9622B"/>
+                </a:solidFill>
+                <a:latin typeface="Calibri"/>
               </a:rPr>
               <a:t>POSTER ART · M-P13-ART · coming</a:t>
             </a:r>
@@ -5104,7 +5104,7 @@
             <a:r>
               <a:rPr sz="1800" b="1">
                 <a:solidFill>
-                  <a:srgbClr val="1F4D2B"/>
+                  <a:srgbClr val="232323"/>
                 </a:solidFill>
                 <a:latin typeface="Georgia"/>
               </a:rPr>
@@ -5143,9 +5143,9 @@
             <a:r>
               <a:rPr sz="1100" b="0">
                 <a:solidFill>
-                  <a:srgbClr val="20190F"/>
-                </a:solidFill>
-                <a:latin typeface="Arial"/>
+                  <a:srgbClr val="232323"/>
+                </a:solidFill>
+                <a:latin typeface="Calibri"/>
               </a:rPr>
               <a:t>A winding path across the poster through six "stops", each a small garden scene matching M-P08's stages, from bare ground (left) to harvest and seed jars (right). Along the path, small symbols show contact types: a single pair walking (individual visit), a circle of people under a tree (cluster visit), a phone (check-in), and at stops 4 and 6 a big…</a:t>
             </a:r>
@@ -5166,7 +5166,7 @@
     <p:bg>
       <p:bgPr>
         <a:solidFill>
-          <a:srgbClr val="F7F2E9"/>
+          <a:srgbClr val="FAF7F0"/>
         </a:solidFill>
         <a:effectLst/>
       </p:bgPr>
@@ -5208,9 +5208,9 @@
             <a:r>
               <a:rPr sz="1000" b="0">
                 <a:solidFill>
-                  <a:srgbClr val="6B6255"/>
-                </a:solidFill>
-                <a:latin typeface="Arial"/>
+                  <a:srgbClr val="232323"/>
+                </a:solidFill>
+                <a:latin typeface="Calibri"/>
               </a:rPr>
               <a:t>M-ON-11   ·   Poster M-P14</a:t>
             </a:r>
@@ -5247,9 +5247,9 @@
             <a:r>
               <a:rPr sz="1000" b="0">
                 <a:solidFill>
-                  <a:srgbClr val="6B6255"/>
-                </a:solidFill>
-                <a:latin typeface="Arial"/>
+                  <a:srgbClr val="232323"/>
+                </a:solidFill>
+                <a:latin typeface="Calibri"/>
               </a:rPr>
               <a:t>Walking With Farmers</a:t>
             </a:r>
@@ -5286,7 +5286,7 @@
             <a:r>
               <a:rPr sz="3800" b="1">
                 <a:solidFill>
-                  <a:srgbClr val="1F4D2B"/>
+                  <a:srgbClr val="232323"/>
                 </a:solidFill>
                 <a:latin typeface="Georgia"/>
               </a:rPr>
@@ -5310,7 +5310,7 @@
             <a:avLst/>
           </a:prstGeom>
           <a:solidFill>
-            <a:srgbClr val="E2D8C4"/>
+            <a:srgbClr val="6E9CC4"/>
           </a:solidFill>
           <a:ln>
             <a:noFill/>
@@ -5369,9 +5369,9 @@
             <a:r>
               <a:rPr sz="2400" b="0">
                 <a:solidFill>
-                  <a:srgbClr val="20190F"/>
-                </a:solidFill>
-                <a:latin typeface="Arial"/>
+                  <a:srgbClr val="232323"/>
+                </a:solidFill>
+                <a:latin typeface="Calibri"/>
               </a:rPr>
               <a:t>•  Harvest · money · slip · invoice</a:t>
             </a:r>
@@ -5385,9 +5385,9 @@
             <a:r>
               <a:rPr sz="2400" b="0">
                 <a:solidFill>
-                  <a:srgbClr val="20190F"/>
-                </a:solidFill>
-                <a:latin typeface="Arial"/>
+                  <a:srgbClr val="232323"/>
+                </a:solidFill>
+                <a:latin typeface="Calibri"/>
               </a:rPr>
               <a:t>•  App or paper, same checks</a:t>
             </a:r>
@@ -5433,7 +5433,7 @@
             <a:avLst/>
           </a:prstGeom>
           <a:solidFill>
-            <a:srgbClr val="20190F"/>
+            <a:srgbClr val="232323"/>
           </a:solidFill>
           <a:ln>
             <a:noFill/>
@@ -5492,9 +5492,9 @@
             <a:r>
               <a:rPr sz="1100" b="0">
                 <a:solidFill>
-                  <a:srgbClr val="F7F2E9"/>
-                </a:solidFill>
-                <a:latin typeface="Arial"/>
+                  <a:srgbClr val="FAF7F0"/>
+                </a:solidFill>
+                <a:latin typeface="Calibri"/>
               </a:rPr>
               <a:t>▶  Clip M-ANI-05 · play from the tablet: watch-04-farm-record.mp4</a:t>
             </a:r>
@@ -5515,7 +5515,7 @@
     <p:bg>
       <p:bgPr>
         <a:solidFill>
-          <a:srgbClr val="F7F2E9"/>
+          <a:srgbClr val="FAF7F0"/>
         </a:solidFill>
         <a:effectLst/>
       </p:bgPr>
@@ -5557,9 +5557,9 @@
             <a:r>
               <a:rPr sz="1000" b="0">
                 <a:solidFill>
-                  <a:srgbClr val="6B6255"/>
-                </a:solidFill>
-                <a:latin typeface="Arial"/>
+                  <a:srgbClr val="232323"/>
+                </a:solidFill>
+                <a:latin typeface="Calibri"/>
               </a:rPr>
               <a:t>M-ON-12   ·   Poster M-P15</a:t>
             </a:r>
@@ -5596,9 +5596,9 @@
             <a:r>
               <a:rPr sz="1000" b="0">
                 <a:solidFill>
-                  <a:srgbClr val="6B6255"/>
-                </a:solidFill>
-                <a:latin typeface="Arial"/>
+                  <a:srgbClr val="232323"/>
+                </a:solidFill>
+                <a:latin typeface="Calibri"/>
               </a:rPr>
               <a:t>Walking With Farmers</a:t>
             </a:r>
@@ -5635,7 +5635,7 @@
             <a:r>
               <a:rPr sz="3800" b="1">
                 <a:solidFill>
-                  <a:srgbClr val="1F4D2B"/>
+                  <a:srgbClr val="232323"/>
                 </a:solidFill>
                 <a:latin typeface="Georgia"/>
               </a:rPr>
@@ -5659,7 +5659,7 @@
             <a:avLst/>
           </a:prstGeom>
           <a:solidFill>
-            <a:srgbClr val="E2D8C4"/>
+            <a:srgbClr val="6E9CC4"/>
           </a:solidFill>
           <a:ln>
             <a:noFill/>
@@ -5718,9 +5718,9 @@
             <a:r>
               <a:rPr sz="2400" b="0">
                 <a:solidFill>
-                  <a:srgbClr val="20190F"/>
-                </a:solidFill>
-                <a:latin typeface="Arial"/>
+                  <a:srgbClr val="232323"/>
+                </a:solidFill>
+                <a:latin typeface="Calibri"/>
               </a:rPr>
               <a:t>•  Stay calm · Listen · Their options · Help</a:t>
             </a:r>
@@ -5734,9 +5734,9 @@
             <a:r>
               <a:rPr sz="2400" b="0">
                 <a:solidFill>
-                  <a:srgbClr val="20190F"/>
-                </a:solidFill>
-                <a:latin typeface="Arial"/>
+                  <a:srgbClr val="232323"/>
+                </a:solidFill>
+                <a:latin typeface="Calibri"/>
               </a:rPr>
               <a:t>•  Send your season plan</a:t>
             </a:r>
@@ -5758,11 +5758,11 @@
             <a:avLst/>
           </a:prstGeom>
           <a:solidFill>
-            <a:srgbClr val="FBF6EC"/>
+            <a:srgbClr val="FAF7F0"/>
           </a:solidFill>
           <a:ln w="15875">
             <a:solidFill>
-              <a:srgbClr val="E2D8C4"/>
+              <a:srgbClr val="6E9CC4"/>
             </a:solidFill>
           </a:ln>
           <a:effectLst/>
@@ -5819,9 +5819,9 @@
             <a:r>
               <a:rPr sz="1200" b="1">
                 <a:solidFill>
-                  <a:srgbClr val="C07A1E"/>
-                </a:solidFill>
-                <a:latin typeface="Arial"/>
+                  <a:srgbClr val="D9622B"/>
+                </a:solidFill>
+                <a:latin typeface="Calibri"/>
               </a:rPr>
               <a:t>POSTER ART · M-P15-ART · coming</a:t>
             </a:r>
@@ -5858,7 +5858,7 @@
             <a:r>
               <a:rPr sz="1800" b="1">
                 <a:solidFill>
-                  <a:srgbClr val="1F4D2B"/>
+                  <a:srgbClr val="232323"/>
                 </a:solidFill>
                 <a:latin typeface="Georgia"/>
               </a:rPr>
@@ -5897,9 +5897,9 @@
             <a:r>
               <a:rPr sz="1100" b="0">
                 <a:solidFill>
-                  <a:srgbClr val="20190F"/>
-                </a:solidFill>
-                <a:latin typeface="Arial"/>
+                  <a:srgbClr val="232323"/>
+                </a:solidFill>
+                <a:latin typeface="Calibri"/>
               </a:rPr>
               <a:t>A dry garden with wilting plants and an empty drum. The farmer sits on the ground, head in hands. Four steps shown as footprints leading to him: the mentor breathing calmly; the mentor sitting beside him listening; the farmer standing, pointing at one small bed he can save; a small group of neighbours arriving with a wheelbarrow of grass mulch. No clinic…</a:t>
             </a:r>
@@ -5920,7 +5920,7 @@
     <p:bg>
       <p:bgPr>
         <a:solidFill>
-          <a:srgbClr val="F7F2E9"/>
+          <a:srgbClr val="FAF7F0"/>
         </a:solidFill>
         <a:effectLst/>
       </p:bgPr>
@@ -5962,9 +5962,9 @@
             <a:r>
               <a:rPr sz="1000" b="0">
                 <a:solidFill>
-                  <a:srgbClr val="6B6255"/>
-                </a:solidFill>
-                <a:latin typeface="Arial"/>
+                  <a:srgbClr val="232323"/>
+                </a:solidFill>
+                <a:latin typeface="Calibri"/>
               </a:rPr>
               <a:t>M-ON-02</a:t>
             </a:r>
@@ -6001,9 +6001,9 @@
             <a:r>
               <a:rPr sz="1000" b="0">
                 <a:solidFill>
-                  <a:srgbClr val="6B6255"/>
-                </a:solidFill>
-                <a:latin typeface="Arial"/>
+                  <a:srgbClr val="232323"/>
+                </a:solidFill>
+                <a:latin typeface="Calibri"/>
               </a:rPr>
               <a:t>Walking With Farmers</a:t>
             </a:r>
@@ -6040,7 +6040,7 @@
             <a:r>
               <a:rPr sz="3800" b="1">
                 <a:solidFill>
-                  <a:srgbClr val="1F4D2B"/>
+                  <a:srgbClr val="232323"/>
                 </a:solidFill>
                 <a:latin typeface="Georgia"/>
               </a:rPr>
@@ -6064,7 +6064,7 @@
             <a:avLst/>
           </a:prstGeom>
           <a:solidFill>
-            <a:srgbClr val="E2D8C4"/>
+            <a:srgbClr val="6E9CC4"/>
           </a:solidFill>
           <a:ln>
             <a:noFill/>
@@ -6123,9 +6123,9 @@
             <a:r>
               <a:rPr sz="2800" b="0">
                 <a:solidFill>
-                  <a:srgbClr val="20190F"/>
-                </a:solidFill>
-                <a:latin typeface="Arial"/>
+                  <a:srgbClr val="232323"/>
+                </a:solidFill>
+                <a:latin typeface="Calibri"/>
               </a:rPr>
               <a:t>•  Voice notes ≤ 2 minutes</a:t>
             </a:r>
@@ -6139,9 +6139,9 @@
             <a:r>
               <a:rPr sz="2800" b="0">
                 <a:solidFill>
-                  <a:srgbClr val="20190F"/>
-                </a:solidFill>
-                <a:latin typeface="Arial"/>
+                  <a:srgbClr val="232323"/>
+                </a:solidFill>
+                <a:latin typeface="Calibri"/>
               </a:rPr>
               <a:t>•  Consent before names or faces</a:t>
             </a:r>
@@ -6155,9 +6155,9 @@
             <a:r>
               <a:rPr sz="2800" b="0">
                 <a:solidFill>
-                  <a:srgbClr val="20190F"/>
-                </a:solidFill>
-                <a:latin typeface="Arial"/>
+                  <a:srgbClr val="232323"/>
+                </a:solidFill>
+                <a:latin typeface="Calibri"/>
               </a:rPr>
               <a:t>•  Printed cards in your hand</a:t>
             </a:r>
@@ -6179,11 +6179,11 @@
             <a:avLst/>
           </a:prstGeom>
           <a:solidFill>
-            <a:srgbClr val="FBF6EC"/>
+            <a:srgbClr val="FAF7F0"/>
           </a:solidFill>
           <a:ln w="15875">
             <a:solidFill>
-              <a:srgbClr val="E2D8C4"/>
+              <a:srgbClr val="6E9CC4"/>
             </a:solidFill>
           </a:ln>
           <a:effectLst/>
@@ -6240,9 +6240,9 @@
             <a:r>
               <a:rPr sz="1200" b="1">
                 <a:solidFill>
-                  <a:srgbClr val="C07A1E"/>
-                </a:solidFill>
-                <a:latin typeface="Arial"/>
+                  <a:srgbClr val="D9622B"/>
+                </a:solidFill>
+                <a:latin typeface="Calibri"/>
               </a:rPr>
               <a:t>IMAGE · M-IMG-10 · coming</a:t>
             </a:r>
@@ -6279,7 +6279,7 @@
             <a:r>
               <a:rPr sz="1800" b="1">
                 <a:solidFill>
-                  <a:srgbClr val="1F4D2B"/>
+                  <a:srgbClr val="232323"/>
                 </a:solidFill>
                 <a:latin typeface="Georgia"/>
               </a:rPr>
@@ -6318,9 +6318,9 @@
             <a:r>
               <a:rPr sz="1100" b="0">
                 <a:solidFill>
-                  <a:srgbClr val="20190F"/>
-                </a:solidFill>
-                <a:latin typeface="Arial"/>
+                  <a:srgbClr val="232323"/>
+                </a:solidFill>
+                <a:latin typeface="Calibri"/>
               </a:rPr>
               <a:t>The mentor sits on a low wall at the edge of a garden in the late afternoon, holding a phone to her mouth to record a voice note, a printed A5 card and notebook on her lap. Blank screen. 16:9. --- **Still images (REUSE)**</a:t>
             </a:r>
@@ -6341,7 +6341,7 @@
     <p:bg>
       <p:bgPr>
         <a:solidFill>
-          <a:srgbClr val="F7F2E9"/>
+          <a:srgbClr val="FAF7F0"/>
         </a:solidFill>
         <a:effectLst/>
       </p:bgPr>
@@ -6383,9 +6383,9 @@
             <a:r>
               <a:rPr sz="1000" b="0">
                 <a:solidFill>
-                  <a:srgbClr val="6B6255"/>
-                </a:solidFill>
-                <a:latin typeface="Arial"/>
+                  <a:srgbClr val="232323"/>
+                </a:solidFill>
+                <a:latin typeface="Calibri"/>
               </a:rPr>
               <a:t>M-ON-03   ·   Poster M-P03</a:t>
             </a:r>
@@ -6422,9 +6422,9 @@
             <a:r>
               <a:rPr sz="1000" b="0">
                 <a:solidFill>
-                  <a:srgbClr val="6B6255"/>
-                </a:solidFill>
-                <a:latin typeface="Arial"/>
+                  <a:srgbClr val="232323"/>
+                </a:solidFill>
+                <a:latin typeface="Calibri"/>
               </a:rPr>
               <a:t>Walking With Farmers</a:t>
             </a:r>
@@ -6461,7 +6461,7 @@
             <a:r>
               <a:rPr sz="3800" b="1">
                 <a:solidFill>
-                  <a:srgbClr val="1F4D2B"/>
+                  <a:srgbClr val="232323"/>
                 </a:solidFill>
                 <a:latin typeface="Georgia"/>
               </a:rPr>
@@ -6485,7 +6485,7 @@
             <a:avLst/>
           </a:prstGeom>
           <a:solidFill>
-            <a:srgbClr val="E2D8C4"/>
+            <a:srgbClr val="6E9CC4"/>
           </a:solidFill>
           <a:ln>
             <a:noFill/>
@@ -6544,9 +6544,9 @@
             <a:r>
               <a:rPr sz="2400" b="0">
                 <a:solidFill>
-                  <a:srgbClr val="20190F"/>
-                </a:solidFill>
-                <a:latin typeface="Arial"/>
+                  <a:srgbClr val="232323"/>
+                </a:solidFill>
+                <a:latin typeface="Calibri"/>
               </a:rPr>
               <a:t>•  Beside, not in front</a:t>
             </a:r>
@@ -6560,9 +6560,9 @@
             <a:r>
               <a:rPr sz="2400" b="0">
                 <a:solidFill>
-                  <a:srgbClr val="20190F"/>
-                </a:solidFill>
-                <a:latin typeface="Arial"/>
+                  <a:srgbClr val="232323"/>
+                </a:solidFill>
+                <a:latin typeface="Calibri"/>
               </a:rPr>
               <a:t>•  Ears · eyes · heart</a:t>
             </a:r>
@@ -6576,9 +6576,9 @@
             <a:r>
               <a:rPr sz="2400" b="0">
                 <a:solidFill>
-                  <a:srgbClr val="20190F"/>
-                </a:solidFill>
-                <a:latin typeface="Arial"/>
+                  <a:srgbClr val="232323"/>
+                </a:solidFill>
+                <a:latin typeface="Calibri"/>
               </a:rPr>
               <a:t>•  Field task: listen for 20 minutes</a:t>
             </a:r>
@@ -6600,11 +6600,11 @@
             <a:avLst/>
           </a:prstGeom>
           <a:solidFill>
-            <a:srgbClr val="FBF6EC"/>
+            <a:srgbClr val="FAF7F0"/>
           </a:solidFill>
           <a:ln w="15875">
             <a:solidFill>
-              <a:srgbClr val="E2D8C4"/>
+              <a:srgbClr val="6E9CC4"/>
             </a:solidFill>
           </a:ln>
           <a:effectLst/>
@@ -6661,9 +6661,9 @@
             <a:r>
               <a:rPr sz="1200" b="1">
                 <a:solidFill>
-                  <a:srgbClr val="C07A1E"/>
-                </a:solidFill>
-                <a:latin typeface="Arial"/>
+                  <a:srgbClr val="D9622B"/>
+                </a:solidFill>
+                <a:latin typeface="Calibri"/>
               </a:rPr>
               <a:t>POSTER ART · M-P01-ART · coming</a:t>
             </a:r>
@@ -6700,7 +6700,7 @@
             <a:r>
               <a:rPr sz="1800" b="1">
                 <a:solidFill>
-                  <a:srgbClr val="1F4D2B"/>
+                  <a:srgbClr val="232323"/>
                 </a:solidFill>
                 <a:latin typeface="Georgia"/>
               </a:rPr>
@@ -6739,9 +6739,9 @@
             <a:r>
               <a:rPr sz="1100" b="0">
                 <a:solidFill>
-                  <a:srgbClr val="20190F"/>
-                </a:solidFill>
-                <a:latin typeface="Arial"/>
+                  <a:srgbClr val="232323"/>
+                </a:solidFill>
+                <a:latin typeface="Calibri"/>
               </a:rPr>
               <a:t>Three small scenes stacked on a dirt path between vegetable beds. Top: a person with a clipboard striding ahead, farmer trailing behind, head down (in front). Middle: the same person behind the farmer, pointing and pushing (behind). Bottom, largest and in full colour: mentor and farmer walking side by side, the farmer pointing at a healthy bed, the…</a:t>
             </a:r>
@@ -6762,7 +6762,7 @@
     <p:bg>
       <p:bgPr>
         <a:solidFill>
-          <a:srgbClr val="F7F2E9"/>
+          <a:srgbClr val="FAF7F0"/>
         </a:solidFill>
         <a:effectLst/>
       </p:bgPr>
@@ -6804,9 +6804,9 @@
             <a:r>
               <a:rPr sz="1000" b="0">
                 <a:solidFill>
-                  <a:srgbClr val="6B6255"/>
-                </a:solidFill>
-                <a:latin typeface="Arial"/>
+                  <a:srgbClr val="232323"/>
+                </a:solidFill>
+                <a:latin typeface="Calibri"/>
               </a:rPr>
               <a:t>M-ON-04   ·   Poster M-P04</a:t>
             </a:r>
@@ -6843,9 +6843,9 @@
             <a:r>
               <a:rPr sz="1000" b="0">
                 <a:solidFill>
-                  <a:srgbClr val="6B6255"/>
-                </a:solidFill>
-                <a:latin typeface="Arial"/>
+                  <a:srgbClr val="232323"/>
+                </a:solidFill>
+                <a:latin typeface="Calibri"/>
               </a:rPr>
               <a:t>Walking With Farmers</a:t>
             </a:r>
@@ -6882,7 +6882,7 @@
             <a:r>
               <a:rPr sz="3800" b="1">
                 <a:solidFill>
-                  <a:srgbClr val="1F4D2B"/>
+                  <a:srgbClr val="232323"/>
                 </a:solidFill>
                 <a:latin typeface="Georgia"/>
               </a:rPr>
@@ -6906,7 +6906,7 @@
             <a:avLst/>
           </a:prstGeom>
           <a:solidFill>
-            <a:srgbClr val="E2D8C4"/>
+            <a:srgbClr val="6E9CC4"/>
           </a:solidFill>
           <a:ln>
             <a:noFill/>
@@ -6965,9 +6965,9 @@
             <a:r>
               <a:rPr sz="2400" b="0">
                 <a:solidFill>
-                  <a:srgbClr val="20190F"/>
-                </a:solidFill>
-                <a:latin typeface="Arial"/>
+                  <a:srgbClr val="232323"/>
+                </a:solidFill>
+                <a:latin typeface="Calibri"/>
               </a:rPr>
               <a:t>•  Closed → open → deeper → their plan</a:t>
             </a:r>
@@ -6981,9 +6981,9 @@
             <a:r>
               <a:rPr sz="2400" b="0">
                 <a:solidFill>
-                  <a:srgbClr val="20190F"/>
-                </a:solidFill>
-                <a:latin typeface="Arial"/>
+                  <a:srgbClr val="232323"/>
+                </a:solidFill>
+                <a:latin typeface="Calibri"/>
               </a:rPr>
               <a:t>•  Start with what's working</a:t>
             </a:r>
@@ -7005,11 +7005,11 @@
             <a:avLst/>
           </a:prstGeom>
           <a:solidFill>
-            <a:srgbClr val="FBF6EC"/>
+            <a:srgbClr val="FAF7F0"/>
           </a:solidFill>
           <a:ln w="15875">
             <a:solidFill>
-              <a:srgbClr val="E2D8C4"/>
+              <a:srgbClr val="6E9CC4"/>
             </a:solidFill>
           </a:ln>
           <a:effectLst/>
@@ -7066,9 +7066,9 @@
             <a:r>
               <a:rPr sz="1200" b="1">
                 <a:solidFill>
-                  <a:srgbClr val="C07A1E"/>
-                </a:solidFill>
-                <a:latin typeface="Arial"/>
+                  <a:srgbClr val="D9622B"/>
+                </a:solidFill>
+                <a:latin typeface="Calibri"/>
               </a:rPr>
               <a:t>POSTER ART · M-P04-ART · coming</a:t>
             </a:r>
@@ -7105,7 +7105,7 @@
             <a:r>
               <a:rPr sz="1800" b="1">
                 <a:solidFill>
-                  <a:srgbClr val="1F4D2B"/>
+                  <a:srgbClr val="232323"/>
                 </a:solidFill>
                 <a:latin typeface="Georgia"/>
               </a:rPr>
@@ -7144,9 +7144,9 @@
             <a:r>
               <a:rPr sz="1100" b="0">
                 <a:solidFill>
-                  <a:srgbClr val="20190F"/>
-                </a:solidFill>
-                <a:latin typeface="Arial"/>
+                  <a:srgbClr val="232323"/>
+                </a:solidFill>
+                <a:latin typeface="Calibri"/>
               </a:rPr>
               <a:t>A wooden ladder leaning against a fruit tree. On the bottom rung the farmer stands with arms folded; on each higher rung the farmer climbs higher, looking more engaged; at the top the farmer is reaching for a ripe fruit with a smile. The mentor steadies the ladder at the bottom. Four rungs highlighted with Ochre numbers.</a:t>
             </a:r>
@@ -7167,7 +7167,7 @@
     <p:bg>
       <p:bgPr>
         <a:solidFill>
-          <a:srgbClr val="F7F2E9"/>
+          <a:srgbClr val="FAF7F0"/>
         </a:solidFill>
         <a:effectLst/>
       </p:bgPr>
@@ -7209,9 +7209,9 @@
             <a:r>
               <a:rPr sz="1000" b="0">
                 <a:solidFill>
-                  <a:srgbClr val="6B6255"/>
-                </a:solidFill>
-                <a:latin typeface="Arial"/>
+                  <a:srgbClr val="232323"/>
+                </a:solidFill>
+                <a:latin typeface="Calibri"/>
               </a:rPr>
               <a:t>M-ON-05   ·   Poster M-P05</a:t>
             </a:r>
@@ -7248,9 +7248,9 @@
             <a:r>
               <a:rPr sz="1000" b="0">
                 <a:solidFill>
-                  <a:srgbClr val="6B6255"/>
-                </a:solidFill>
-                <a:latin typeface="Arial"/>
+                  <a:srgbClr val="232323"/>
+                </a:solidFill>
+                <a:latin typeface="Calibri"/>
               </a:rPr>
               <a:t>Walking With Farmers</a:t>
             </a:r>
@@ -7287,7 +7287,7 @@
             <a:r>
               <a:rPr sz="3800" b="1">
                 <a:solidFill>
-                  <a:srgbClr val="1F4D2B"/>
+                  <a:srgbClr val="232323"/>
                 </a:solidFill>
                 <a:latin typeface="Georgia"/>
               </a:rPr>
@@ -7311,7 +7311,7 @@
             <a:avLst/>
           </a:prstGeom>
           <a:solidFill>
-            <a:srgbClr val="E2D8C4"/>
+            <a:srgbClr val="6E9CC4"/>
           </a:solidFill>
           <a:ln>
             <a:noFill/>
@@ -7370,9 +7370,9 @@
             <a:r>
               <a:rPr sz="2400" b="0">
                 <a:solidFill>
-                  <a:srgbClr val="20190F"/>
-                </a:solidFill>
-                <a:latin typeface="Arial"/>
+                  <a:srgbClr val="232323"/>
+                </a:solidFill>
+                <a:latin typeface="Calibri"/>
               </a:rPr>
               <a:t>•  I do · We do · You do</a:t>
             </a:r>
@@ -7386,9 +7386,9 @@
             <a:r>
               <a:rPr sz="2400" b="0">
                 <a:solidFill>
-                  <a:srgbClr val="20190F"/>
-                </a:solidFill>
-                <a:latin typeface="Arial"/>
+                  <a:srgbClr val="232323"/>
+                </a:solidFill>
+                <a:latin typeface="Calibri"/>
               </a:rPr>
               <a:t>•  Field task: photo of the farmer's hands</a:t>
             </a:r>
@@ -7410,11 +7410,11 @@
             <a:avLst/>
           </a:prstGeom>
           <a:solidFill>
-            <a:srgbClr val="FBF6EC"/>
+            <a:srgbClr val="FAF7F0"/>
           </a:solidFill>
           <a:ln w="15875">
             <a:solidFill>
-              <a:srgbClr val="E2D8C4"/>
+              <a:srgbClr val="6E9CC4"/>
             </a:solidFill>
           </a:ln>
           <a:effectLst/>
@@ -7471,9 +7471,9 @@
             <a:r>
               <a:rPr sz="1200" b="1">
                 <a:solidFill>
-                  <a:srgbClr val="C07A1E"/>
-                </a:solidFill>
-                <a:latin typeface="Arial"/>
+                  <a:srgbClr val="D9622B"/>
+                </a:solidFill>
+                <a:latin typeface="Calibri"/>
               </a:rPr>
               <a:t>POSTER ART · M-P05-ART · coming</a:t>
             </a:r>
@@ -7510,7 +7510,7 @@
             <a:r>
               <a:rPr sz="1800" b="1">
                 <a:solidFill>
-                  <a:srgbClr val="1F4D2B"/>
+                  <a:srgbClr val="232323"/>
                 </a:solidFill>
                 <a:latin typeface="Georgia"/>
               </a:rPr>
@@ -7549,9 +7549,9 @@
             <a:r>
               <a:rPr sz="1100" b="0">
                 <a:solidFill>
-                  <a:srgbClr val="20190F"/>
-                </a:solidFill>
-                <a:latin typeface="Arial"/>
+                  <a:srgbClr val="232323"/>
+                </a:solidFill>
+                <a:latin typeface="Calibri"/>
               </a:rPr>
               <a:t>Three panels left to right on one strip of garden, the same pair each time, laying a knotted spacing string along a bed and planting seedlings. Panel 1: mentor plants, farmer watches. Panel 2: both kneeling, the farmer's hands on the seedling, the mentor's hand guiding. Panel 3: the farmer planting alone; the mentor standing back with hands in pockets,…</a:t>
             </a:r>
@@ -7572,7 +7572,7 @@
     <p:bg>
       <p:bgPr>
         <a:solidFill>
-          <a:srgbClr val="F7F2E9"/>
+          <a:srgbClr val="FAF7F0"/>
         </a:solidFill>
         <a:effectLst/>
       </p:bgPr>
@@ -7614,9 +7614,9 @@
             <a:r>
               <a:rPr sz="1000" b="0">
                 <a:solidFill>
-                  <a:srgbClr val="6B6255"/>
-                </a:solidFill>
-                <a:latin typeface="Arial"/>
+                  <a:srgbClr val="232323"/>
+                </a:solidFill>
+                <a:latin typeface="Calibri"/>
               </a:rPr>
               <a:t>M-ON-06   ·   Poster M-P06</a:t>
             </a:r>
@@ -7653,9 +7653,9 @@
             <a:r>
               <a:rPr sz="1000" b="0">
                 <a:solidFill>
-                  <a:srgbClr val="6B6255"/>
-                </a:solidFill>
-                <a:latin typeface="Arial"/>
+                  <a:srgbClr val="232323"/>
+                </a:solidFill>
+                <a:latin typeface="Calibri"/>
               </a:rPr>
               <a:t>Walking With Farmers</a:t>
             </a:r>
@@ -7692,7 +7692,7 @@
             <a:r>
               <a:rPr sz="3800" b="1">
                 <a:solidFill>
-                  <a:srgbClr val="1F4D2B"/>
+                  <a:srgbClr val="232323"/>
                 </a:solidFill>
                 <a:latin typeface="Georgia"/>
               </a:rPr>
@@ -7716,7 +7716,7 @@
             <a:avLst/>
           </a:prstGeom>
           <a:solidFill>
-            <a:srgbClr val="E2D8C4"/>
+            <a:srgbClr val="6E9CC4"/>
           </a:solidFill>
           <a:ln>
             <a:noFill/>
@@ -7775,9 +7775,9 @@
             <a:r>
               <a:rPr sz="2800" b="0">
                 <a:solidFill>
-                  <a:srgbClr val="20190F"/>
-                </a:solidFill>
-                <a:latin typeface="Arial"/>
+                  <a:srgbClr val="232323"/>
+                </a:solidFill>
+                <a:latin typeface="Calibri"/>
               </a:rPr>
               <a:t>•  What · Who · By when</a:t>
             </a:r>
@@ -7791,9 +7791,9 @@
             <a:r>
               <a:rPr sz="2800" b="0">
                 <a:solidFill>
-                  <a:srgbClr val="20190F"/>
-                </a:solidFill>
-                <a:latin typeface="Arial"/>
+                  <a:srgbClr val="232323"/>
+                </a:solidFill>
+                <a:latin typeface="Calibri"/>
               </a:rPr>
               <a:t>•  How will we know?</a:t>
             </a:r>
@@ -7815,11 +7815,11 @@
             <a:avLst/>
           </a:prstGeom>
           <a:solidFill>
-            <a:srgbClr val="FBF6EC"/>
+            <a:srgbClr val="FAF7F0"/>
           </a:solidFill>
           <a:ln w="15875">
             <a:solidFill>
-              <a:srgbClr val="E2D8C4"/>
+              <a:srgbClr val="6E9CC4"/>
             </a:solidFill>
           </a:ln>
           <a:effectLst/>
@@ -7876,9 +7876,9 @@
             <a:r>
               <a:rPr sz="1200" b="1">
                 <a:solidFill>
-                  <a:srgbClr val="C07A1E"/>
-                </a:solidFill>
-                <a:latin typeface="Arial"/>
+                  <a:srgbClr val="D9622B"/>
+                </a:solidFill>
+                <a:latin typeface="Calibri"/>
               </a:rPr>
               <a:t>POSTER ART · M-P06-ART · coming</a:t>
             </a:r>
@@ -7915,7 +7915,7 @@
             <a:r>
               <a:rPr sz="1800" b="1">
                 <a:solidFill>
-                  <a:srgbClr val="1F4D2B"/>
+                  <a:srgbClr val="232323"/>
                 </a:solidFill>
                 <a:latin typeface="Georgia"/>
               </a:rPr>
@@ -7954,9 +7954,9 @@
             <a:r>
               <a:rPr sz="1100" b="0">
                 <a:solidFill>
-                  <a:srgbClr val="20190F"/>
-                </a:solidFill>
-                <a:latin typeface="Arial"/>
+                  <a:srgbClr val="232323"/>
+                </a:solidFill>
+                <a:latin typeface="Calibri"/>
               </a:rPr>
               <a:t>The mentor and farmer shaking hands over a garden bed at the end of a visit. Around them, four corner vignettes: a bundle of dry grass mulch on a bed (what); the farmer's grandson carrying grass (who); a wall calendar with one square circled (by when — no numbers); the same bed later, covered in mulch, with the mentor looking and the farmer pointing (how…</a:t>
             </a:r>
@@ -7977,7 +7977,7 @@
     <p:bg>
       <p:bgPr>
         <a:solidFill>
-          <a:srgbClr val="F7F2E9"/>
+          <a:srgbClr val="FAF7F0"/>
         </a:solidFill>
         <a:effectLst/>
       </p:bgPr>
@@ -8019,9 +8019,9 @@
             <a:r>
               <a:rPr sz="1000" b="0">
                 <a:solidFill>
-                  <a:srgbClr val="6B6255"/>
-                </a:solidFill>
-                <a:latin typeface="Arial"/>
+                  <a:srgbClr val="232323"/>
+                </a:solidFill>
+                <a:latin typeface="Calibri"/>
               </a:rPr>
               <a:t>M-ON-07   ·   Poster M-P07</a:t>
             </a:r>
@@ -8058,9 +8058,9 @@
             <a:r>
               <a:rPr sz="1000" b="0">
                 <a:solidFill>
-                  <a:srgbClr val="6B6255"/>
-                </a:solidFill>
-                <a:latin typeface="Arial"/>
+                  <a:srgbClr val="232323"/>
+                </a:solidFill>
+                <a:latin typeface="Calibri"/>
               </a:rPr>
               <a:t>Walking With Farmers</a:t>
             </a:r>
@@ -8097,7 +8097,7 @@
             <a:r>
               <a:rPr sz="3800" b="1">
                 <a:solidFill>
-                  <a:srgbClr val="1F4D2B"/>
+                  <a:srgbClr val="232323"/>
                 </a:solidFill>
                 <a:latin typeface="Georgia"/>
               </a:rPr>
@@ -8121,7 +8121,7 @@
             <a:avLst/>
           </a:prstGeom>
           <a:solidFill>
-            <a:srgbClr val="E2D8C4"/>
+            <a:srgbClr val="6E9CC4"/>
           </a:solidFill>
           <a:ln>
             <a:noFill/>
@@ -8180,9 +8180,9 @@
             <a:r>
               <a:rPr sz="2400" b="0">
                 <a:solidFill>
-                  <a:srgbClr val="20190F"/>
-                </a:solidFill>
-                <a:latin typeface="Arial"/>
+                  <a:srgbClr val="232323"/>
+                </a:solidFill>
+                <a:latin typeface="Calibri"/>
               </a:rPr>
               <a:t>•  Five fingers, five steps</a:t>
             </a:r>
@@ -8196,9 +8196,9 @@
             <a:r>
               <a:rPr sz="2400" b="0">
                 <a:solidFill>
-                  <a:srgbClr val="20190F"/>
-                </a:solidFill>
-                <a:latin typeface="Arial"/>
+                  <a:srgbClr val="232323"/>
+                </a:solidFill>
+                <a:latin typeface="Calibri"/>
               </a:rPr>
               <a:t>•  Field task: a full visit, buddy observes</a:t>
             </a:r>
@@ -8220,11 +8220,11 @@
             <a:avLst/>
           </a:prstGeom>
           <a:solidFill>
-            <a:srgbClr val="FBF6EC"/>
+            <a:srgbClr val="FAF7F0"/>
           </a:solidFill>
           <a:ln w="15875">
             <a:solidFill>
-              <a:srgbClr val="E2D8C4"/>
+              <a:srgbClr val="6E9CC4"/>
             </a:solidFill>
           </a:ln>
           <a:effectLst/>
@@ -8281,9 +8281,9 @@
             <a:r>
               <a:rPr sz="1200" b="1">
                 <a:solidFill>
-                  <a:srgbClr val="C07A1E"/>
-                </a:solidFill>
-                <a:latin typeface="Arial"/>
+                  <a:srgbClr val="D9622B"/>
+                </a:solidFill>
+                <a:latin typeface="Calibri"/>
               </a:rPr>
               <a:t>POSTER ART · M-P07-ART · coming</a:t>
             </a:r>
@@ -8320,7 +8320,7 @@
             <a:r>
               <a:rPr sz="1800" b="1">
                 <a:solidFill>
-                  <a:srgbClr val="1F4D2B"/>
+                  <a:srgbClr val="232323"/>
                 </a:solidFill>
                 <a:latin typeface="Georgia"/>
               </a:rPr>
@@ -8359,9 +8359,9 @@
             <a:r>
               <a:rPr sz="1100" b="0">
                 <a:solidFill>
-                  <a:srgbClr val="20190F"/>
-                </a:solidFill>
-                <a:latin typeface="Arial"/>
+                  <a:srgbClr val="232323"/>
+                </a:solidFill>
+                <a:latin typeface="Calibri"/>
               </a:rPr>
               <a:t>A large open hand (brown skin tone, palm towards viewer, fingers spread). In each fingertip a small round scene: thumb — mentor and farmer looking at a mulched bed together (look back); pointing finger — the pair walking between beds, farmer pointing; middle finger (tallest) — the pair sitting in shade talking; ring finger — both kneeling, farmer's hands…</a:t>
             </a:r>
@@ -8382,7 +8382,7 @@
     <p:bg>
       <p:bgPr>
         <a:solidFill>
-          <a:srgbClr val="F7F2E9"/>
+          <a:srgbClr val="FAF7F0"/>
         </a:solidFill>
         <a:effectLst/>
       </p:bgPr>
@@ -8424,9 +8424,9 @@
             <a:r>
               <a:rPr sz="1000" b="0">
                 <a:solidFill>
-                  <a:srgbClr val="6B6255"/>
-                </a:solidFill>
-                <a:latin typeface="Arial"/>
+                  <a:srgbClr val="232323"/>
+                </a:solidFill>
+                <a:latin typeface="Calibri"/>
               </a:rPr>
               <a:t>M-ON-08   ·   Poster M-P14</a:t>
             </a:r>
@@ -8463,9 +8463,9 @@
             <a:r>
               <a:rPr sz="1000" b="0">
                 <a:solidFill>
-                  <a:srgbClr val="6B6255"/>
-                </a:solidFill>
-                <a:latin typeface="Arial"/>
+                  <a:srgbClr val="232323"/>
+                </a:solidFill>
+                <a:latin typeface="Calibri"/>
               </a:rPr>
               <a:t>Walking With Farmers</a:t>
             </a:r>
@@ -8502,7 +8502,7 @@
             <a:r>
               <a:rPr sz="3800" b="1">
                 <a:solidFill>
-                  <a:srgbClr val="1F4D2B"/>
+                  <a:srgbClr val="232323"/>
                 </a:solidFill>
                 <a:latin typeface="Georgia"/>
               </a:rPr>
@@ -8526,7 +8526,7 @@
             <a:avLst/>
           </a:prstGeom>
           <a:solidFill>
-            <a:srgbClr val="E2D8C4"/>
+            <a:srgbClr val="6E9CC4"/>
           </a:solidFill>
           <a:ln>
             <a:noFill/>
@@ -8585,9 +8585,9 @@
             <a:r>
               <a:rPr sz="2400" b="0">
                 <a:solidFill>
-                  <a:srgbClr val="20190F"/>
-                </a:solidFill>
-                <a:latin typeface="Arial"/>
+                  <a:srgbClr val="232323"/>
+                </a:solidFill>
+                <a:latin typeface="Calibri"/>
               </a:rPr>
               <a:t>•  App: Record visit, offline draft</a:t>
             </a:r>
@@ -8601,9 +8601,9 @@
             <a:r>
               <a:rPr sz="2400" b="0">
                 <a:solidFill>
-                  <a:srgbClr val="20190F"/>
-                </a:solidFill>
-                <a:latin typeface="Arial"/>
+                  <a:srgbClr val="232323"/>
+                </a:solidFill>
+                <a:latin typeface="Calibri"/>
               </a:rPr>
               <a:t>•  Paper: five boxes, read it back</a:t>
             </a:r>
@@ -8617,9 +8617,9 @@
             <a:r>
               <a:rPr sz="2400" b="0">
                 <a:solidFill>
-                  <a:srgbClr val="20190F"/>
-                </a:solidFill>
-                <a:latin typeface="Arial"/>
+                  <a:srgbClr val="232323"/>
+                </a:solidFill>
+                <a:latin typeface="Calibri"/>
               </a:rPr>
               <a:t>•  Field task: go back, close the action</a:t>
             </a:r>
@@ -8641,11 +8641,11 @@
             <a:avLst/>
           </a:prstGeom>
           <a:solidFill>
-            <a:srgbClr val="FBF6EC"/>
+            <a:srgbClr val="FAF7F0"/>
           </a:solidFill>
           <a:ln w="15875">
             <a:solidFill>
-              <a:srgbClr val="E2D8C4"/>
+              <a:srgbClr val="6E9CC4"/>
             </a:solidFill>
           </a:ln>
           <a:effectLst/>
@@ -8702,9 +8702,9 @@
             <a:r>
               <a:rPr sz="1200" b="1">
                 <a:solidFill>
-                  <a:srgbClr val="C07A1E"/>
-                </a:solidFill>
-                <a:latin typeface="Arial"/>
+                  <a:srgbClr val="D9622B"/>
+                </a:solidFill>
+                <a:latin typeface="Calibri"/>
               </a:rPr>
               <a:t>POSTER ART · M-P14-ART · coming</a:t>
             </a:r>
@@ -8741,7 +8741,7 @@
             <a:r>
               <a:rPr sz="1800" b="1">
                 <a:solidFill>
-                  <a:srgbClr val="1F4D2B"/>
+                  <a:srgbClr val="232323"/>
                 </a:solidFill>
                 <a:latin typeface="Georgia"/>
               </a:rPr>
@@ -8780,9 +8780,9 @@
             <a:r>
               <a:rPr sz="1100" b="0">
                 <a:solidFill>
-                  <a:srgbClr val="20190F"/>
-                </a:solidFill>
-                <a:latin typeface="Arial"/>
+                  <a:srgbClr val="232323"/>
+                </a:solidFill>
+                <a:latin typeface="Calibri"/>
               </a:rPr>
               <a:t>A path that splits around a tree into two lanes and joins again. Left lane: the youth holds a smartphone (screen blank), showing it to the gogo farmer. Right lane: the gogo writes in an exercise book with a pencil; an envelope of slips and a carbon invoice book beside her. Both lanes pass the same four objects: a hanging scale with a bunch of spinach, a…</a:t>
             </a:r>
@@ -8803,7 +8803,7 @@
     <p:bg>
       <p:bgPr>
         <a:solidFill>
-          <a:srgbClr val="F7F2E9"/>
+          <a:srgbClr val="FAF7F0"/>
         </a:solidFill>
         <a:effectLst/>
       </p:bgPr>
@@ -8845,9 +8845,9 @@
             <a:r>
               <a:rPr sz="1000" b="0">
                 <a:solidFill>
-                  <a:srgbClr val="6B6255"/>
-                </a:solidFill>
-                <a:latin typeface="Arial"/>
+                  <a:srgbClr val="232323"/>
+                </a:solidFill>
+                <a:latin typeface="Calibri"/>
               </a:rPr>
               <a:t>M-ON-09   ·   Poster M-P09</a:t>
             </a:r>
@@ -8884,9 +8884,9 @@
             <a:r>
               <a:rPr sz="1000" b="0">
                 <a:solidFill>
-                  <a:srgbClr val="6B6255"/>
-                </a:solidFill>
-                <a:latin typeface="Arial"/>
+                  <a:srgbClr val="232323"/>
+                </a:solidFill>
+                <a:latin typeface="Calibri"/>
               </a:rPr>
               <a:t>Walking With Farmers</a:t>
             </a:r>
@@ -8923,7 +8923,7 @@
             <a:r>
               <a:rPr sz="3800" b="1">
                 <a:solidFill>
-                  <a:srgbClr val="1F4D2B"/>
+                  <a:srgbClr val="232323"/>
                 </a:solidFill>
                 <a:latin typeface="Georgia"/>
               </a:rPr>
@@ -8947,7 +8947,7 @@
             <a:avLst/>
           </a:prstGeom>
           <a:solidFill>
-            <a:srgbClr val="E2D8C4"/>
+            <a:srgbClr val="6E9CC4"/>
           </a:solidFill>
           <a:ln>
             <a:noFill/>
@@ -9006,9 +9006,9 @@
             <a:r>
               <a:rPr sz="2800" b="0">
                 <a:solidFill>
-                  <a:srgbClr val="20190F"/>
-                </a:solidFill>
-                <a:latin typeface="Arial"/>
+                  <a:srgbClr val="232323"/>
+                </a:solidFill>
+                <a:latin typeface="Calibri"/>
               </a:rPr>
               <a:t>•  Red · Amber · Green</a:t>
             </a:r>
@@ -9022,9 +9022,9 @@
             <a:r>
               <a:rPr sz="2800" b="0">
                 <a:solidFill>
-                  <a:srgbClr val="20190F"/>
-                </a:solidFill>
-                <a:latin typeface="Arial"/>
+                  <a:srgbClr val="232323"/>
+                </a:solidFill>
+                <a:latin typeface="Calibri"/>
               </a:rPr>
               <a:t>•  Do your own sum</a:t>
             </a:r>
@@ -9046,11 +9046,11 @@
             <a:avLst/>
           </a:prstGeom>
           <a:solidFill>
-            <a:srgbClr val="FBF6EC"/>
+            <a:srgbClr val="FAF7F0"/>
           </a:solidFill>
           <a:ln w="15875">
             <a:solidFill>
-              <a:srgbClr val="E2D8C4"/>
+              <a:srgbClr val="6E9CC4"/>
             </a:solidFill>
           </a:ln>
           <a:effectLst/>
@@ -9107,9 +9107,9 @@
             <a:r>
               <a:rPr sz="1200" b="1">
                 <a:solidFill>
-                  <a:srgbClr val="C07A1E"/>
-                </a:solidFill>
-                <a:latin typeface="Arial"/>
+                  <a:srgbClr val="D9622B"/>
+                </a:solidFill>
+                <a:latin typeface="Calibri"/>
               </a:rPr>
               <a:t>POSTER ART · M-P09-ART · coming</a:t>
             </a:r>
@@ -9146,7 +9146,7 @@
             <a:r>
               <a:rPr sz="1800" b="1">
                 <a:solidFill>
-                  <a:srgbClr val="1F4D2B"/>
+                  <a:srgbClr val="232323"/>
                 </a:solidFill>
                 <a:latin typeface="Georgia"/>
               </a:rPr>
@@ -9185,9 +9185,9 @@
             <a:r>
               <a:rPr sz="1100" b="0">
                 <a:solidFill>
-                  <a:srgbClr val="20190F"/>
-                </a:solidFill>
-                <a:latin typeface="Arial"/>
+                  <a:srgbClr val="232323"/>
+                </a:solidFill>
+                <a:latin typeface="Calibri"/>
               </a:rPr>
               <a:t>A tall traffic light made from three stacked round shapes, each with a small scene beside it. Top (Red, with a triangle pattern for B&amp;W): a bare, dry garden and a worried farmer — the mentor walking towards them. Middle (Amber/Ochre, with dots): a half-planted garden, farmer working. Bottom (Green/Leaf, with stripes): a lush garden and a farmer showing…</a:t>
             </a:r>

--- a/courses/build/mentor-3day/M-ON.pptx
+++ b/courses/build/mentor-3day/M-ON.pptx
@@ -676,7 +676,7 @@
           </a:p>
           <a:p>
             <a:r>
-              <a:t>Clip M-ANI-05: public/course-animations/market-community/watch-04-farm-record.mp4</a:t>
+              <a:t>Clip M-ANI-05: public/course-media/mentor-3day/M-ANI-05.mp4</a:t>
             </a:r>
           </a:p>
         </p:txBody>
@@ -5394,49 +5394,27 @@
           </a:p>
         </p:txBody>
       </p:sp>
-      <p:pic>
-        <p:nvPicPr>
-          <p:cNvPr id="7" name="Picture 6" descr="watch-04-farm-record.jpg"/>
-          <p:cNvPicPr>
-            <a:picLocks noChangeAspect="1"/>
-          </p:cNvPicPr>
-          <p:nvPr/>
-        </p:nvPicPr>
-        <p:blipFill>
-          <a:blip r:embed="rId2"/>
-          <a:stretch>
-            <a:fillRect/>
-          </a:stretch>
-        </p:blipFill>
-        <p:spPr>
-          <a:xfrm>
-            <a:off x="5852160" y="2308860"/>
-            <a:ext cx="5852160" cy="3291840"/>
-          </a:xfrm>
-          <a:prstGeom prst="rect">
-            <a:avLst/>
-          </a:prstGeom>
-        </p:spPr>
-      </p:pic>
-      <p:sp>
-        <p:nvSpPr>
-          <p:cNvPr id="8" name="Rectangle 7"/>
+      <p:sp>
+        <p:nvSpPr>
+          <p:cNvPr id="7" name="Rectangle 6"/>
           <p:cNvSpPr/>
           <p:nvPr/>
         </p:nvSpPr>
         <p:spPr>
           <a:xfrm>
-            <a:off x="5852160" y="5806440"/>
-            <a:ext cx="5852160" cy="411480"/>
+            <a:off x="5852160" y="1691640"/>
+            <a:ext cx="5852160" cy="4526280"/>
           </a:xfrm>
           <a:prstGeom prst="rect">
             <a:avLst/>
           </a:prstGeom>
           <a:solidFill>
-            <a:srgbClr val="232323"/>
+            <a:srgbClr val="FAF7F0"/>
           </a:solidFill>
-          <a:ln>
-            <a:noFill/>
+          <a:ln w="15875">
+            <a:solidFill>
+              <a:srgbClr val="6E9CC4"/>
+            </a:solidFill>
           </a:ln>
           <a:effectLst/>
         </p:spPr>
@@ -5464,14 +5442,14 @@
       </p:sp>
       <p:sp>
         <p:nvSpPr>
-          <p:cNvPr id="9" name="TextBox 8"/>
+          <p:cNvPr id="8" name="TextBox 7"/>
           <p:cNvSpPr txBox="1"/>
           <p:nvPr/>
         </p:nvSpPr>
         <p:spPr>
           <a:xfrm>
-            <a:off x="5943600" y="5815584"/>
-            <a:ext cx="5669280" cy="384048"/>
+            <a:off x="6080760" y="1874520"/>
+            <a:ext cx="5394960" cy="365760"/>
           </a:xfrm>
           <a:prstGeom prst="rect">
             <a:avLst/>
@@ -5479,7 +5457,7 @@
           <a:noFill/>
         </p:spPr>
         <p:txBody>
-          <a:bodyPr wrap="square" anchor="ctr" lIns="45720" rIns="45720">
+          <a:bodyPr wrap="square" anchor="t" lIns="45720" rIns="45720">
             <a:spAutoFit/>
           </a:bodyPr>
           <a:lstStyle/>
@@ -5490,13 +5468,91 @@
               </a:spcAft>
             </a:pPr>
             <a:r>
-              <a:rPr sz="1100" b="0">
-                <a:solidFill>
-                  <a:srgbClr val="FAF7F0"/>
+              <a:rPr sz="1200" b="1">
+                <a:solidFill>
+                  <a:srgbClr val="D9622B"/>
                 </a:solidFill>
                 <a:latin typeface="Calibri"/>
               </a:rPr>
-              <a:t>▶  Clip M-ANI-05 · play from the tablet: watch-04-farm-record.mp4</a:t>
+              <a:t>ANIMATION · M-ANI-05 · coming</a:t>
+            </a:r>
+          </a:p>
+        </p:txBody>
+      </p:sp>
+      <p:sp>
+        <p:nvSpPr>
+          <p:cNvPr id="9" name="TextBox 8"/>
+          <p:cNvSpPr txBox="1"/>
+          <p:nvPr/>
+        </p:nvSpPr>
+        <p:spPr>
+          <a:xfrm>
+            <a:off x="6080760" y="2258568"/>
+            <a:ext cx="5394960" cy="457200"/>
+          </a:xfrm>
+          <a:prstGeom prst="rect">
+            <a:avLst/>
+          </a:prstGeom>
+          <a:noFill/>
+        </p:spPr>
+        <p:txBody>
+          <a:bodyPr wrap="square" anchor="t" lIns="45720" rIns="45720">
+            <a:spAutoFit/>
+          </a:bodyPr>
+          <a:lstStyle/>
+          <a:p>
+            <a:pPr algn="l">
+              <a:spcAft>
+                <a:spcPts val="800"/>
+              </a:spcAft>
+            </a:pPr>
+            <a:r>
+              <a:rPr sz="1800" b="1">
+                <a:solidFill>
+                  <a:srgbClr val="232323"/>
+                </a:solidFill>
+                <a:latin typeface="Georgia"/>
+              </a:rPr>
+              <a:t>Keeping a farm record</a:t>
+            </a:r>
+          </a:p>
+        </p:txBody>
+      </p:sp>
+      <p:sp>
+        <p:nvSpPr>
+          <p:cNvPr id="10" name="TextBox 9"/>
+          <p:cNvSpPr txBox="1"/>
+          <p:nvPr/>
+        </p:nvSpPr>
+        <p:spPr>
+          <a:xfrm>
+            <a:off x="6080760" y="2788920"/>
+            <a:ext cx="5394960" cy="3246120"/>
+          </a:xfrm>
+          <a:prstGeom prst="rect">
+            <a:avLst/>
+          </a:prstGeom>
+          <a:noFill/>
+        </p:spPr>
+        <p:txBody>
+          <a:bodyPr wrap="square" anchor="t" lIns="45720" rIns="45720">
+            <a:spAutoFit/>
+          </a:bodyPr>
+          <a:lstStyle/>
+          <a:p>
+            <a:pPr algn="l">
+              <a:spcAft>
+                <a:spcPts val="800"/>
+              </a:spcAft>
+            </a:pPr>
+            <a:r>
+              <a:rPr sz="1100" b="0">
+                <a:solidFill>
+                  <a:srgbClr val="232323"/>
+                </a:solidFill>
+                <a:latin typeface="Calibri"/>
+              </a:rPr>
+              <a:t>A hand makes tally marks in two columns of a simple exercise book beside a basket of harvested greens and a hanging scale; bunches move from the basket into three piles (eat, share, sell) as marks appear. Marks are simple strokes, never readable writing. (Replaces the withdrawn clip `market-community/watch-04-farm-record.mp4`.)</a:t>
             </a:r>
           </a:p>
         </p:txBody>
